--- a/slides/2-3_monitor_guideline/2-3_monitor_guideline.pptx
+++ b/slides/2-3_monitor_guideline/2-3_monitor_guideline.pptx
@@ -2323,7 +2323,7 @@
           <a:ln/>
         </p:spPr>
         <p:txBody>
-          <a:bodyPr wrap="square" lIns="0" tIns="0" rIns="0" bIns="0" rtlCol="0" anchor="ctr"/>
+          <a:bodyPr wrap="none" lIns="0" tIns="0" rIns="0" bIns="0" rtlCol="0" anchor="ctr"/>
           <a:lstStyle/>
           <a:p>
             <a:pPr algn="ctr" indent="0" marL="0">
@@ -2366,7 +2366,7 @@
           <a:ln/>
         </p:spPr>
         <p:txBody>
-          <a:bodyPr wrap="square" lIns="0" tIns="0" rIns="0" bIns="0" rtlCol="0" anchor="ctr"/>
+          <a:bodyPr wrap="none" lIns="0" tIns="0" rIns="0" bIns="0" rtlCol="0" anchor="ctr"/>
           <a:lstStyle/>
           <a:p>
             <a:pPr algn="ctr" indent="0" marL="0">
@@ -2409,7 +2409,7 @@
           <a:ln/>
         </p:spPr>
         <p:txBody>
-          <a:bodyPr wrap="square" lIns="0" tIns="0" rIns="0" bIns="0" rtlCol="0" anchor="ctr"/>
+          <a:bodyPr wrap="none" lIns="0" tIns="0" rIns="0" bIns="0" rtlCol="0" anchor="ctr"/>
           <a:lstStyle/>
           <a:p>
             <a:pPr algn="ctr" indent="0" marL="0">
@@ -2452,7 +2452,7 @@
           <a:ln/>
         </p:spPr>
         <p:txBody>
-          <a:bodyPr wrap="square" lIns="0" tIns="0" rIns="0" bIns="0" rtlCol="0" anchor="ctr"/>
+          <a:bodyPr wrap="none" lIns="0" tIns="0" rIns="0" bIns="0" rtlCol="0" anchor="ctr"/>
           <a:lstStyle/>
           <a:p>
             <a:pPr algn="ctr" indent="0" marL="0">
@@ -2495,7 +2495,7 @@
           <a:ln/>
         </p:spPr>
         <p:txBody>
-          <a:bodyPr wrap="square" lIns="0" tIns="0" rIns="0" bIns="0" rtlCol="0" anchor="ctr"/>
+          <a:bodyPr wrap="none" lIns="0" tIns="0" rIns="0" bIns="0" rtlCol="0" anchor="ctr"/>
           <a:lstStyle/>
           <a:p>
             <a:pPr algn="ctr" indent="0" marL="0">
@@ -3069,7 +3069,7 @@
           <a:ln/>
         </p:spPr>
         <p:txBody>
-          <a:bodyPr wrap="square" lIns="0" tIns="0" rIns="0" bIns="0" rtlCol="0" anchor="ctr"/>
+          <a:bodyPr wrap="none" lIns="0" tIns="0" rIns="0" bIns="0" rtlCol="0" anchor="ctr"/>
           <a:lstStyle/>
           <a:p>
             <a:pPr algn="ctr" indent="0" marL="0">
@@ -3112,7 +3112,7 @@
           <a:ln/>
         </p:spPr>
         <p:txBody>
-          <a:bodyPr wrap="square" lIns="0" tIns="0" rIns="0" bIns="0" rtlCol="0" anchor="ctr"/>
+          <a:bodyPr wrap="none" lIns="0" tIns="0" rIns="0" bIns="0" rtlCol="0" anchor="ctr"/>
           <a:lstStyle/>
           <a:p>
             <a:pPr algn="ctr" indent="0" marL="0">
@@ -3155,7 +3155,7 @@
           <a:ln/>
         </p:spPr>
         <p:txBody>
-          <a:bodyPr wrap="square" lIns="0" tIns="0" rIns="0" bIns="0" rtlCol="0" anchor="ctr"/>
+          <a:bodyPr wrap="none" lIns="0" tIns="0" rIns="0" bIns="0" rtlCol="0" anchor="ctr"/>
           <a:lstStyle/>
           <a:p>
             <a:pPr algn="ctr" indent="0" marL="0">
@@ -3198,7 +3198,7 @@
           <a:ln/>
         </p:spPr>
         <p:txBody>
-          <a:bodyPr wrap="square" lIns="0" tIns="0" rIns="0" bIns="0" rtlCol="0" anchor="ctr"/>
+          <a:bodyPr wrap="none" lIns="0" tIns="0" rIns="0" bIns="0" rtlCol="0" anchor="ctr"/>
           <a:lstStyle/>
           <a:p>
             <a:pPr algn="ctr" indent="0" marL="0">
@@ -3241,7 +3241,7 @@
           <a:ln/>
         </p:spPr>
         <p:txBody>
-          <a:bodyPr wrap="square" lIns="0" tIns="0" rIns="0" bIns="0" rtlCol="0" anchor="ctr"/>
+          <a:bodyPr wrap="none" lIns="0" tIns="0" rIns="0" bIns="0" rtlCol="0" anchor="ctr"/>
           <a:lstStyle/>
           <a:p>
             <a:pPr algn="ctr" indent="0" marL="0">
@@ -3635,7 +3635,7 @@
           <a:ln/>
         </p:spPr>
         <p:txBody>
-          <a:bodyPr wrap="square" lIns="0" tIns="0" rIns="0" bIns="0" rtlCol="0" anchor="ctr"/>
+          <a:bodyPr wrap="none" lIns="0" tIns="0" rIns="0" bIns="0" rtlCol="0" anchor="ctr"/>
           <a:lstStyle/>
           <a:p>
             <a:pPr algn="ctr" indent="0" marL="0">
@@ -3678,7 +3678,7 @@
           <a:ln/>
         </p:spPr>
         <p:txBody>
-          <a:bodyPr wrap="square" lIns="0" tIns="0" rIns="0" bIns="0" rtlCol="0" anchor="ctr"/>
+          <a:bodyPr wrap="none" lIns="0" tIns="0" rIns="0" bIns="0" rtlCol="0" anchor="ctr"/>
           <a:lstStyle/>
           <a:p>
             <a:pPr algn="ctr" indent="0" marL="0">
@@ -3721,7 +3721,7 @@
           <a:ln/>
         </p:spPr>
         <p:txBody>
-          <a:bodyPr wrap="square" lIns="0" tIns="0" rIns="0" bIns="0" rtlCol="0" anchor="ctr"/>
+          <a:bodyPr wrap="none" lIns="0" tIns="0" rIns="0" bIns="0" rtlCol="0" anchor="ctr"/>
           <a:lstStyle/>
           <a:p>
             <a:pPr algn="ctr" indent="0" marL="0">
@@ -3764,7 +3764,7 @@
           <a:ln/>
         </p:spPr>
         <p:txBody>
-          <a:bodyPr wrap="square" lIns="0" tIns="0" rIns="0" bIns="0" rtlCol="0" anchor="ctr"/>
+          <a:bodyPr wrap="none" lIns="0" tIns="0" rIns="0" bIns="0" rtlCol="0" anchor="ctr"/>
           <a:lstStyle/>
           <a:p>
             <a:pPr algn="ctr" indent="0" marL="0">
@@ -3807,7 +3807,7 @@
           <a:ln/>
         </p:spPr>
         <p:txBody>
-          <a:bodyPr wrap="square" lIns="0" tIns="0" rIns="0" bIns="0" rtlCol="0" anchor="ctr"/>
+          <a:bodyPr wrap="none" lIns="0" tIns="0" rIns="0" bIns="0" rtlCol="0" anchor="ctr"/>
           <a:lstStyle/>
           <a:p>
             <a:pPr algn="ctr" indent="0" marL="0">
@@ -4320,7 +4320,7 @@
           <a:ln/>
         </p:spPr>
         <p:txBody>
-          <a:bodyPr wrap="square" lIns="0" tIns="0" rIns="0" bIns="0" rtlCol="0" anchor="ctr"/>
+          <a:bodyPr wrap="none" lIns="0" tIns="0" rIns="0" bIns="0" rtlCol="0" anchor="ctr"/>
           <a:lstStyle/>
           <a:p>
             <a:pPr algn="ctr" indent="0" marL="0">
@@ -4363,7 +4363,7 @@
           <a:ln/>
         </p:spPr>
         <p:txBody>
-          <a:bodyPr wrap="square" lIns="0" tIns="0" rIns="0" bIns="0" rtlCol="0" anchor="ctr"/>
+          <a:bodyPr wrap="none" lIns="0" tIns="0" rIns="0" bIns="0" rtlCol="0" anchor="ctr"/>
           <a:lstStyle/>
           <a:p>
             <a:pPr algn="ctr" indent="0" marL="0">
@@ -4406,7 +4406,7 @@
           <a:ln/>
         </p:spPr>
         <p:txBody>
-          <a:bodyPr wrap="square" lIns="0" tIns="0" rIns="0" bIns="0" rtlCol="0" anchor="ctr"/>
+          <a:bodyPr wrap="none" lIns="0" tIns="0" rIns="0" bIns="0" rtlCol="0" anchor="ctr"/>
           <a:lstStyle/>
           <a:p>
             <a:pPr algn="ctr" indent="0" marL="0">
@@ -4449,7 +4449,7 @@
           <a:ln/>
         </p:spPr>
         <p:txBody>
-          <a:bodyPr wrap="square" lIns="0" tIns="0" rIns="0" bIns="0" rtlCol="0" anchor="ctr"/>
+          <a:bodyPr wrap="none" lIns="0" tIns="0" rIns="0" bIns="0" rtlCol="0" anchor="ctr"/>
           <a:lstStyle/>
           <a:p>
             <a:pPr algn="ctr" indent="0" marL="0">
@@ -4492,7 +4492,7 @@
           <a:ln/>
         </p:spPr>
         <p:txBody>
-          <a:bodyPr wrap="square" lIns="0" tIns="0" rIns="0" bIns="0" rtlCol="0" anchor="ctr"/>
+          <a:bodyPr wrap="none" lIns="0" tIns="0" rIns="0" bIns="0" rtlCol="0" anchor="ctr"/>
           <a:lstStyle/>
           <a:p>
             <a:pPr algn="ctr" indent="0" marL="0">
@@ -5608,7 +5608,7 @@
           <a:ln/>
         </p:spPr>
         <p:txBody>
-          <a:bodyPr wrap="square" lIns="0" tIns="0" rIns="0" bIns="0" rtlCol="0" anchor="ctr"/>
+          <a:bodyPr wrap="none" lIns="0" tIns="0" rIns="0" bIns="0" rtlCol="0" anchor="ctr"/>
           <a:lstStyle/>
           <a:p>
             <a:pPr algn="ctr" indent="0" marL="0">
@@ -5651,7 +5651,7 @@
           <a:ln/>
         </p:spPr>
         <p:txBody>
-          <a:bodyPr wrap="square" lIns="0" tIns="0" rIns="0" bIns="0" rtlCol="0" anchor="ctr"/>
+          <a:bodyPr wrap="none" lIns="0" tIns="0" rIns="0" bIns="0" rtlCol="0" anchor="ctr"/>
           <a:lstStyle/>
           <a:p>
             <a:pPr algn="ctr" indent="0" marL="0">
@@ -5694,7 +5694,7 @@
           <a:ln/>
         </p:spPr>
         <p:txBody>
-          <a:bodyPr wrap="square" lIns="0" tIns="0" rIns="0" bIns="0" rtlCol="0" anchor="ctr"/>
+          <a:bodyPr wrap="none" lIns="0" tIns="0" rIns="0" bIns="0" rtlCol="0" anchor="ctr"/>
           <a:lstStyle/>
           <a:p>
             <a:pPr algn="ctr" indent="0" marL="0">
@@ -5737,7 +5737,7 @@
           <a:ln/>
         </p:spPr>
         <p:txBody>
-          <a:bodyPr wrap="square" lIns="0" tIns="0" rIns="0" bIns="0" rtlCol="0" anchor="ctr"/>
+          <a:bodyPr wrap="none" lIns="0" tIns="0" rIns="0" bIns="0" rtlCol="0" anchor="ctr"/>
           <a:lstStyle/>
           <a:p>
             <a:pPr algn="ctr" indent="0" marL="0">
@@ -5780,7 +5780,7 @@
           <a:ln/>
         </p:spPr>
         <p:txBody>
-          <a:bodyPr wrap="square" lIns="0" tIns="0" rIns="0" bIns="0" rtlCol="0" anchor="ctr"/>
+          <a:bodyPr wrap="none" lIns="0" tIns="0" rIns="0" bIns="0" rtlCol="0" anchor="ctr"/>
           <a:lstStyle/>
           <a:p>
             <a:pPr algn="ctr" indent="0" marL="0">
@@ -6302,7 +6302,7 @@
           <a:ln/>
         </p:spPr>
         <p:txBody>
-          <a:bodyPr wrap="square" lIns="0" tIns="0" rIns="0" bIns="0" rtlCol="0" anchor="ctr"/>
+          <a:bodyPr wrap="none" lIns="0" tIns="0" rIns="0" bIns="0" rtlCol="0" anchor="ctr"/>
           <a:lstStyle/>
           <a:p>
             <a:pPr algn="ctr" indent="0" marL="0">
@@ -6345,7 +6345,7 @@
           <a:ln/>
         </p:spPr>
         <p:txBody>
-          <a:bodyPr wrap="square" lIns="0" tIns="0" rIns="0" bIns="0" rtlCol="0" anchor="ctr"/>
+          <a:bodyPr wrap="none" lIns="0" tIns="0" rIns="0" bIns="0" rtlCol="0" anchor="ctr"/>
           <a:lstStyle/>
           <a:p>
             <a:pPr algn="ctr" indent="0" marL="0">
@@ -6388,7 +6388,7 @@
           <a:ln/>
         </p:spPr>
         <p:txBody>
-          <a:bodyPr wrap="square" lIns="0" tIns="0" rIns="0" bIns="0" rtlCol="0" anchor="ctr"/>
+          <a:bodyPr wrap="none" lIns="0" tIns="0" rIns="0" bIns="0" rtlCol="0" anchor="ctr"/>
           <a:lstStyle/>
           <a:p>
             <a:pPr algn="ctr" indent="0" marL="0">
@@ -6431,7 +6431,7 @@
           <a:ln/>
         </p:spPr>
         <p:txBody>
-          <a:bodyPr wrap="square" lIns="0" tIns="0" rIns="0" bIns="0" rtlCol="0" anchor="ctr"/>
+          <a:bodyPr wrap="none" lIns="0" tIns="0" rIns="0" bIns="0" rtlCol="0" anchor="ctr"/>
           <a:lstStyle/>
           <a:p>
             <a:pPr algn="ctr" indent="0" marL="0">
@@ -6474,7 +6474,7 @@
           <a:ln/>
         </p:spPr>
         <p:txBody>
-          <a:bodyPr wrap="square" lIns="0" tIns="0" rIns="0" bIns="0" rtlCol="0" anchor="ctr"/>
+          <a:bodyPr wrap="none" lIns="0" tIns="0" rIns="0" bIns="0" rtlCol="0" anchor="ctr"/>
           <a:lstStyle/>
           <a:p>
             <a:pPr algn="ctr" indent="0" marL="0">
@@ -7203,7 +7203,7 @@
           <a:ln/>
         </p:spPr>
         <p:txBody>
-          <a:bodyPr wrap="square" lIns="0" tIns="0" rIns="0" bIns="0" rtlCol="0" anchor="ctr"/>
+          <a:bodyPr wrap="none" lIns="0" tIns="0" rIns="0" bIns="0" rtlCol="0" anchor="ctr"/>
           <a:lstStyle/>
           <a:p>
             <a:pPr algn="ctr" indent="0" marL="0">
@@ -7246,7 +7246,7 @@
           <a:ln/>
         </p:spPr>
         <p:txBody>
-          <a:bodyPr wrap="square" lIns="0" tIns="0" rIns="0" bIns="0" rtlCol="0" anchor="ctr"/>
+          <a:bodyPr wrap="none" lIns="0" tIns="0" rIns="0" bIns="0" rtlCol="0" anchor="ctr"/>
           <a:lstStyle/>
           <a:p>
             <a:pPr algn="ctr" indent="0" marL="0">
@@ -7289,7 +7289,7 @@
           <a:ln/>
         </p:spPr>
         <p:txBody>
-          <a:bodyPr wrap="square" lIns="0" tIns="0" rIns="0" bIns="0" rtlCol="0" anchor="ctr"/>
+          <a:bodyPr wrap="none" lIns="0" tIns="0" rIns="0" bIns="0" rtlCol="0" anchor="ctr"/>
           <a:lstStyle/>
           <a:p>
             <a:pPr algn="ctr" indent="0" marL="0">
@@ -7332,7 +7332,7 @@
           <a:ln/>
         </p:spPr>
         <p:txBody>
-          <a:bodyPr wrap="square" lIns="0" tIns="0" rIns="0" bIns="0" rtlCol="0" anchor="ctr"/>
+          <a:bodyPr wrap="none" lIns="0" tIns="0" rIns="0" bIns="0" rtlCol="0" anchor="ctr"/>
           <a:lstStyle/>
           <a:p>
             <a:pPr algn="ctr" indent="0" marL="0">
@@ -7375,7 +7375,7 @@
           <a:ln/>
         </p:spPr>
         <p:txBody>
-          <a:bodyPr wrap="square" lIns="0" tIns="0" rIns="0" bIns="0" rtlCol="0" anchor="ctr"/>
+          <a:bodyPr wrap="none" lIns="0" tIns="0" rIns="0" bIns="0" rtlCol="0" anchor="ctr"/>
           <a:lstStyle/>
           <a:p>
             <a:pPr algn="ctr" indent="0" marL="0">
@@ -8223,7 +8223,7 @@
           <a:ln/>
         </p:spPr>
         <p:txBody>
-          <a:bodyPr wrap="square" lIns="0" tIns="0" rIns="0" bIns="0" rtlCol="0" anchor="ctr"/>
+          <a:bodyPr wrap="none" lIns="0" tIns="0" rIns="0" bIns="0" rtlCol="0" anchor="ctr"/>
           <a:lstStyle/>
           <a:p>
             <a:pPr algn="ctr" indent="0" marL="0">
@@ -8266,7 +8266,7 @@
           <a:ln/>
         </p:spPr>
         <p:txBody>
-          <a:bodyPr wrap="square" lIns="0" tIns="0" rIns="0" bIns="0" rtlCol="0" anchor="ctr"/>
+          <a:bodyPr wrap="none" lIns="0" tIns="0" rIns="0" bIns="0" rtlCol="0" anchor="ctr"/>
           <a:lstStyle/>
           <a:p>
             <a:pPr algn="ctr" indent="0" marL="0">
@@ -8309,7 +8309,7 @@
           <a:ln/>
         </p:spPr>
         <p:txBody>
-          <a:bodyPr wrap="square" lIns="0" tIns="0" rIns="0" bIns="0" rtlCol="0" anchor="ctr"/>
+          <a:bodyPr wrap="none" lIns="0" tIns="0" rIns="0" bIns="0" rtlCol="0" anchor="ctr"/>
           <a:lstStyle/>
           <a:p>
             <a:pPr algn="ctr" indent="0" marL="0">
@@ -8352,7 +8352,7 @@
           <a:ln/>
         </p:spPr>
         <p:txBody>
-          <a:bodyPr wrap="square" lIns="0" tIns="0" rIns="0" bIns="0" rtlCol="0" anchor="ctr"/>
+          <a:bodyPr wrap="none" lIns="0" tIns="0" rIns="0" bIns="0" rtlCol="0" anchor="ctr"/>
           <a:lstStyle/>
           <a:p>
             <a:pPr algn="ctr" indent="0" marL="0">
@@ -8395,7 +8395,7 @@
           <a:ln/>
         </p:spPr>
         <p:txBody>
-          <a:bodyPr wrap="square" lIns="0" tIns="0" rIns="0" bIns="0" rtlCol="0" anchor="ctr"/>
+          <a:bodyPr wrap="none" lIns="0" tIns="0" rIns="0" bIns="0" rtlCol="0" anchor="ctr"/>
           <a:lstStyle/>
           <a:p>
             <a:pPr algn="ctr" indent="0" marL="0">
@@ -9564,7 +9564,7 @@
           <a:ln/>
         </p:spPr>
         <p:txBody>
-          <a:bodyPr wrap="square" lIns="0" tIns="0" rIns="0" bIns="0" rtlCol="0" anchor="ctr"/>
+          <a:bodyPr wrap="none" lIns="0" tIns="0" rIns="0" bIns="0" rtlCol="0" anchor="ctr"/>
           <a:lstStyle/>
           <a:p>
             <a:pPr algn="ctr" indent="0" marL="0">
@@ -9607,7 +9607,7 @@
           <a:ln/>
         </p:spPr>
         <p:txBody>
-          <a:bodyPr wrap="square" lIns="0" tIns="0" rIns="0" bIns="0" rtlCol="0" anchor="ctr"/>
+          <a:bodyPr wrap="none" lIns="0" tIns="0" rIns="0" bIns="0" rtlCol="0" anchor="ctr"/>
           <a:lstStyle/>
           <a:p>
             <a:pPr algn="ctr" indent="0" marL="0">
@@ -9650,7 +9650,7 @@
           <a:ln/>
         </p:spPr>
         <p:txBody>
-          <a:bodyPr wrap="square" lIns="0" tIns="0" rIns="0" bIns="0" rtlCol="0" anchor="ctr"/>
+          <a:bodyPr wrap="none" lIns="0" tIns="0" rIns="0" bIns="0" rtlCol="0" anchor="ctr"/>
           <a:lstStyle/>
           <a:p>
             <a:pPr algn="ctr" indent="0" marL="0">
@@ -9693,7 +9693,7 @@
           <a:ln/>
         </p:spPr>
         <p:txBody>
-          <a:bodyPr wrap="square" lIns="0" tIns="0" rIns="0" bIns="0" rtlCol="0" anchor="ctr"/>
+          <a:bodyPr wrap="none" lIns="0" tIns="0" rIns="0" bIns="0" rtlCol="0" anchor="ctr"/>
           <a:lstStyle/>
           <a:p>
             <a:pPr algn="ctr" indent="0" marL="0">
@@ -9736,7 +9736,7 @@
           <a:ln/>
         </p:spPr>
         <p:txBody>
-          <a:bodyPr wrap="square" lIns="0" tIns="0" rIns="0" bIns="0" rtlCol="0" anchor="ctr"/>
+          <a:bodyPr wrap="none" lIns="0" tIns="0" rIns="0" bIns="0" rtlCol="0" anchor="ctr"/>
           <a:lstStyle/>
           <a:p>
             <a:pPr algn="ctr" indent="0" marL="0">
@@ -11663,7 +11663,7 @@
           <a:ln/>
         </p:spPr>
         <p:txBody>
-          <a:bodyPr wrap="square" lIns="0" tIns="0" rIns="0" bIns="0" rtlCol="0" anchor="ctr"/>
+          <a:bodyPr wrap="none" lIns="0" tIns="0" rIns="0" bIns="0" rtlCol="0" anchor="ctr"/>
           <a:lstStyle/>
           <a:p>
             <a:pPr algn="ctr" indent="0" marL="0">
@@ -11706,7 +11706,7 @@
           <a:ln/>
         </p:spPr>
         <p:txBody>
-          <a:bodyPr wrap="square" lIns="0" tIns="0" rIns="0" bIns="0" rtlCol="0" anchor="ctr"/>
+          <a:bodyPr wrap="none" lIns="0" tIns="0" rIns="0" bIns="0" rtlCol="0" anchor="ctr"/>
           <a:lstStyle/>
           <a:p>
             <a:pPr algn="ctr" indent="0" marL="0">
@@ -11749,7 +11749,7 @@
           <a:ln/>
         </p:spPr>
         <p:txBody>
-          <a:bodyPr wrap="square" lIns="0" tIns="0" rIns="0" bIns="0" rtlCol="0" anchor="ctr"/>
+          <a:bodyPr wrap="none" lIns="0" tIns="0" rIns="0" bIns="0" rtlCol="0" anchor="ctr"/>
           <a:lstStyle/>
           <a:p>
             <a:pPr algn="ctr" indent="0" marL="0">
@@ -11792,7 +11792,7 @@
           <a:ln/>
         </p:spPr>
         <p:txBody>
-          <a:bodyPr wrap="square" lIns="0" tIns="0" rIns="0" bIns="0" rtlCol="0" anchor="ctr"/>
+          <a:bodyPr wrap="none" lIns="0" tIns="0" rIns="0" bIns="0" rtlCol="0" anchor="ctr"/>
           <a:lstStyle/>
           <a:p>
             <a:pPr algn="ctr" indent="0" marL="0">
@@ -11835,7 +11835,7 @@
           <a:ln/>
         </p:spPr>
         <p:txBody>
-          <a:bodyPr wrap="square" lIns="0" tIns="0" rIns="0" bIns="0" rtlCol="0" anchor="ctr"/>
+          <a:bodyPr wrap="none" lIns="0" tIns="0" rIns="0" bIns="0" rtlCol="0" anchor="ctr"/>
           <a:lstStyle/>
           <a:p>
             <a:pPr algn="ctr" indent="0" marL="0">
